--- a/Defensa en el Proyecto - ABP.pptx
+++ b/Defensa en el Proyecto - ABP.pptx
@@ -142,12 +142,12 @@
   <pc:docChgLst>
     <pc:chgData name="Cristian B. Albarracin" userId="e8a91181e28c2be2" providerId="LiveId" clId="{A3E2793A-C79D-4ED2-9B0F-F07E7AD4525F}"/>
     <pc:docChg chg="undo custSel modSld">
-      <pc:chgData name="Cristian B. Albarracin" userId="e8a91181e28c2be2" providerId="LiveId" clId="{A3E2793A-C79D-4ED2-9B0F-F07E7AD4525F}" dt="2025-10-29T00:31:52.892" v="389" actId="20577"/>
+      <pc:chgData name="Cristian B. Albarracin" userId="e8a91181e28c2be2" providerId="LiveId" clId="{A3E2793A-C79D-4ED2-9B0F-F07E7AD4525F}" dt="2025-10-29T01:04:20.298" v="390" actId="6549"/>
       <pc:docMkLst>
         <pc:docMk/>
       </pc:docMkLst>
       <pc:sldChg chg="addSp delSp modSp mod">
-        <pc:chgData name="Cristian B. Albarracin" userId="e8a91181e28c2be2" providerId="LiveId" clId="{A3E2793A-C79D-4ED2-9B0F-F07E7AD4525F}" dt="2025-10-29T00:31:52.892" v="389" actId="20577"/>
+        <pc:chgData name="Cristian B. Albarracin" userId="e8a91181e28c2be2" providerId="LiveId" clId="{A3E2793A-C79D-4ED2-9B0F-F07E7AD4525F}" dt="2025-10-29T01:04:20.298" v="390" actId="6549"/>
         <pc:sldMkLst>
           <pc:docMk/>
           <pc:sldMk cId="0" sldId="256"/>
@@ -249,7 +249,7 @@
           </ac:spMkLst>
         </pc:spChg>
         <pc:spChg chg="mod">
-          <ac:chgData name="Cristian B. Albarracin" userId="e8a91181e28c2be2" providerId="LiveId" clId="{A3E2793A-C79D-4ED2-9B0F-F07E7AD4525F}" dt="2025-10-29T00:31:52.892" v="389" actId="20577"/>
+          <ac:chgData name="Cristian B. Albarracin" userId="e8a91181e28c2be2" providerId="LiveId" clId="{A3E2793A-C79D-4ED2-9B0F-F07E7AD4525F}" dt="2025-10-29T01:04:20.298" v="390" actId="6549"/>
           <ac:spMkLst>
             <pc:docMk/>
             <pc:sldMk cId="0" sldId="256"/>
@@ -5317,18 +5317,12 @@
               </a:r>
               <a:r>
                 <a:rPr lang="es-AR" sz="2400" dirty="0"/>
-                <a:t> o VS Code</a:t>
+                <a:t> o VS Code, MySQL, customer_data.csv y sales_data.csv</a:t>
               </a:r>
               <a:r>
                 <a:rPr lang="es-AR" sz="2400"/>
-                <a:t>, MySQL, </a:t>
+                <a:t>. </a:t>
               </a:r>
-              <a:r>
-                <a:rPr lang="es-AR" sz="2400" dirty="0"/>
-                <a:t>customer_data.csv y sales_data.csv. Tiempo: (No especificado en las fuentes, asumir duración estándar de trabajo práctico).</a:t>
-              </a:r>
-            </a:p>
-            <a:p>
               <a:endParaRPr lang="es-AR" dirty="0"/>
             </a:p>
           </p:txBody>

--- a/Defensa en el Proyecto - ABP.pptx
+++ b/Defensa en el Proyecto - ABP.pptx
@@ -132,7 +132,7 @@
 <file path=ppt/revisionInfo.xml><?xml version="1.0" encoding="utf-8"?>
 <p1510:revInfo xmlns:a="http://schemas.openxmlformats.org/drawingml/2006/main" xmlns:r="http://schemas.openxmlformats.org/officeDocument/2006/relationships" xmlns:p1510="http://schemas.microsoft.com/office/powerpoint/2015/10/main">
   <p1510:revLst>
-    <p1510:client id="{A0B67763-0696-4327-BC59-A3A68D6C59FE}" v="20" dt="2025-10-29T00:31:44.485"/>
+    <p1510:client id="{A0B67763-0696-4327-BC59-A3A68D6C59FE}" v="21" dt="2025-10-29T01:09:15.733"/>
   </p1510:revLst>
 </p1510:revInfo>
 </file>
@@ -142,12 +142,12 @@
   <pc:docChgLst>
     <pc:chgData name="Cristian B. Albarracin" userId="e8a91181e28c2be2" providerId="LiveId" clId="{A3E2793A-C79D-4ED2-9B0F-F07E7AD4525F}"/>
     <pc:docChg chg="undo custSel modSld">
-      <pc:chgData name="Cristian B. Albarracin" userId="e8a91181e28c2be2" providerId="LiveId" clId="{A3E2793A-C79D-4ED2-9B0F-F07E7AD4525F}" dt="2025-10-29T01:04:20.298" v="390" actId="6549"/>
+      <pc:chgData name="Cristian B. Albarracin" userId="e8a91181e28c2be2" providerId="LiveId" clId="{A3E2793A-C79D-4ED2-9B0F-F07E7AD4525F}" dt="2025-10-29T01:10:24.615" v="416" actId="20577"/>
       <pc:docMkLst>
         <pc:docMk/>
       </pc:docMkLst>
       <pc:sldChg chg="addSp delSp modSp mod">
-        <pc:chgData name="Cristian B. Albarracin" userId="e8a91181e28c2be2" providerId="LiveId" clId="{A3E2793A-C79D-4ED2-9B0F-F07E7AD4525F}" dt="2025-10-29T01:04:20.298" v="390" actId="6549"/>
+        <pc:chgData name="Cristian B. Albarracin" userId="e8a91181e28c2be2" providerId="LiveId" clId="{A3E2793A-C79D-4ED2-9B0F-F07E7AD4525F}" dt="2025-10-29T01:10:24.615" v="416" actId="20577"/>
         <pc:sldMkLst>
           <pc:docMk/>
           <pc:sldMk cId="0" sldId="256"/>
@@ -201,7 +201,7 @@
           </ac:spMkLst>
         </pc:spChg>
         <pc:spChg chg="mod">
-          <ac:chgData name="Cristian B. Albarracin" userId="e8a91181e28c2be2" providerId="LiveId" clId="{A3E2793A-C79D-4ED2-9B0F-F07E7AD4525F}" dt="2025-10-29T00:22:32.079" v="375" actId="6549"/>
+          <ac:chgData name="Cristian B. Albarracin" userId="e8a91181e28c2be2" providerId="LiveId" clId="{A3E2793A-C79D-4ED2-9B0F-F07E7AD4525F}" dt="2025-10-29T01:10:24.615" v="416" actId="20577"/>
           <ac:spMkLst>
             <pc:docMk/>
             <pc:sldMk cId="0" sldId="256"/>
@@ -464,6 +464,22 @@
             <ac:graphicFrameMk id="65" creationId="{0C2DB067-5B29-BD1C-8DAF-226865A6B49A}"/>
           </ac:graphicFrameMkLst>
         </pc:graphicFrameChg>
+        <pc:picChg chg="add mod">
+          <ac:chgData name="Cristian B. Albarracin" userId="e8a91181e28c2be2" providerId="LiveId" clId="{A3E2793A-C79D-4ED2-9B0F-F07E7AD4525F}" dt="2025-10-29T01:08:04.845" v="395" actId="1076"/>
+          <ac:picMkLst>
+            <pc:docMk/>
+            <pc:sldMk cId="0" sldId="256"/>
+            <ac:picMk id="77" creationId="{A7A4736E-D357-67C5-0B93-A04F2DDC0F07}"/>
+          </ac:picMkLst>
+        </pc:picChg>
+        <pc:picChg chg="add mod">
+          <ac:chgData name="Cristian B. Albarracin" userId="e8a91181e28c2be2" providerId="LiveId" clId="{A3E2793A-C79D-4ED2-9B0F-F07E7AD4525F}" dt="2025-10-29T01:08:07.394" v="396" actId="1076"/>
+          <ac:picMkLst>
+            <pc:docMk/>
+            <pc:sldMk cId="0" sldId="256"/>
+            <ac:picMk id="79" creationId="{31C92737-CB2D-D2FD-66C6-3B87BC568014}"/>
+          </ac:picMkLst>
+        </pc:picChg>
       </pc:sldChg>
     </pc:docChg>
   </pc:docChgLst>
@@ -4164,6 +4180,64 @@
             <a:p>
               <a:endParaRPr lang="es-AR" dirty="0"/>
             </a:p>
+            <a:p>
+              <a:pPr marL="285750" indent="-285750">
+                <a:buFont typeface="Arial" panose="020B0604020202020204" pitchFamily="34" charset="0"/>
+                <a:buChar char="•"/>
+              </a:pPr>
+              <a:r>
+                <a:rPr lang="es-AR" sz="2400" b="1" dirty="0"/>
+                <a:t>Modo de pago más frecuente (global y por género</a:t>
+              </a:r>
+              <a:r>
+                <a:rPr lang="es-AR" sz="2400" b="1"/>
+                <a:t>) </a:t>
+              </a:r>
+            </a:p>
+            <a:p>
+              <a:pPr marL="285750" indent="-285750">
+                <a:buFont typeface="Arial" panose="020B0604020202020204" pitchFamily="34" charset="0"/>
+                <a:buChar char="•"/>
+              </a:pPr>
+              <a:r>
+                <a:rPr lang="es-AR" sz="2400" b="1"/>
+                <a:t>Categorización </a:t>
+              </a:r>
+              <a:r>
+                <a:rPr lang="es-AR" sz="2400" b="1" dirty="0"/>
+                <a:t>de clientes por forma de pago, edad y género</a:t>
+              </a:r>
+            </a:p>
+            <a:p>
+              <a:pPr marL="285750" indent="-285750">
+                <a:buFont typeface="Arial" panose="020B0604020202020204" pitchFamily="34" charset="0"/>
+                <a:buChar char="•"/>
+              </a:pPr>
+              <a:r>
+                <a:rPr lang="es-AR" sz="2400" b="1" dirty="0"/>
+                <a:t>Métodos de pago en rango etario 25–35</a:t>
+              </a:r>
+            </a:p>
+            <a:p>
+              <a:pPr marL="285750" indent="-285750">
+                <a:buFont typeface="Arial" panose="020B0604020202020204" pitchFamily="34" charset="0"/>
+                <a:buChar char="•"/>
+              </a:pPr>
+              <a:r>
+                <a:rPr lang="es-AR" sz="2400" b="1" dirty="0"/>
+                <a:t>Métodos de pago más usados por mujeres</a:t>
+              </a:r>
+            </a:p>
+            <a:p>
+              <a:pPr marL="285750" indent="-285750">
+                <a:buFont typeface="Arial" panose="020B0604020202020204" pitchFamily="34" charset="0"/>
+                <a:buChar char="•"/>
+              </a:pPr>
+              <a:r>
+                <a:rPr lang="es-AR" sz="2400" b="1" dirty="0"/>
+                <a:t>Precios por categoría de producto</a:t>
+              </a:r>
+            </a:p>
           </p:txBody>
         </p:sp>
         <p:sp>
@@ -5317,11 +5391,7 @@
               </a:r>
               <a:r>
                 <a:rPr lang="es-AR" sz="2400" dirty="0"/>
-                <a:t> o VS Code, MySQL, customer_data.csv y sales_data.csv</a:t>
-              </a:r>
-              <a:r>
-                <a:rPr lang="es-AR" sz="2400"/>
-                <a:t>. </a:t>
+                <a:t> o VS Code, MySQL, customer_data.csv y sales_data.csv. </a:t>
               </a:r>
               <a:endParaRPr lang="es-AR" dirty="0"/>
             </a:p>
@@ -6582,6 +6652,66 @@
           </a:p>
         </p:txBody>
       </p:sp>
+      <p:pic>
+        <p:nvPicPr>
+          <p:cNvPr id="77" name="Imagen 76">
+            <a:extLst>
+              <a:ext uri="{FF2B5EF4-FFF2-40B4-BE49-F238E27FC236}">
+                <a16:creationId xmlns:a16="http://schemas.microsoft.com/office/drawing/2014/main" id="{A7A4736E-D357-67C5-0B93-A04F2DDC0F07}"/>
+              </a:ext>
+            </a:extLst>
+          </p:cNvPr>
+          <p:cNvPicPr>
+            <a:picLocks noChangeAspect="1"/>
+          </p:cNvPicPr>
+          <p:nvPr/>
+        </p:nvPicPr>
+        <p:blipFill>
+          <a:blip r:embed="rId8"/>
+          <a:stretch>
+            <a:fillRect/>
+          </a:stretch>
+        </p:blipFill>
+        <p:spPr>
+          <a:xfrm>
+            <a:off x="5037502" y="17304092"/>
+            <a:ext cx="5058481" cy="3801005"/>
+          </a:xfrm>
+          <a:prstGeom prst="rect">
+            <a:avLst/>
+          </a:prstGeom>
+        </p:spPr>
+      </p:pic>
+      <p:pic>
+        <p:nvPicPr>
+          <p:cNvPr id="79" name="Imagen 78">
+            <a:extLst>
+              <a:ext uri="{FF2B5EF4-FFF2-40B4-BE49-F238E27FC236}">
+                <a16:creationId xmlns:a16="http://schemas.microsoft.com/office/drawing/2014/main" id="{31C92737-CB2D-D2FD-66C6-3B87BC568014}"/>
+              </a:ext>
+            </a:extLst>
+          </p:cNvPr>
+          <p:cNvPicPr>
+            <a:picLocks noChangeAspect="1"/>
+          </p:cNvPicPr>
+          <p:nvPr/>
+        </p:nvPicPr>
+        <p:blipFill>
+          <a:blip r:embed="rId9"/>
+          <a:stretch>
+            <a:fillRect/>
+          </a:stretch>
+        </p:blipFill>
+        <p:spPr>
+          <a:xfrm>
+            <a:off x="10664865" y="17308854"/>
+            <a:ext cx="5058481" cy="3791479"/>
+          </a:xfrm>
+          <a:prstGeom prst="rect">
+            <a:avLst/>
+          </a:prstGeom>
+        </p:spPr>
+      </p:pic>
     </p:spTree>
   </p:cSld>
   <p:clrMapOvr>
